--- a/inter/12.pptx
+++ b/inter/12.pptx
@@ -145,7 +145,7 @@
       </p:grpSpPr>
       <p:sp>
         <p:nvSpPr>
-          <p:cNvPr id="1821840108" name="页眉占位符 1"/>
+          <p:cNvPr id="505355800" name="页眉占位符 1"/>
           <p:cNvSpPr>
             <a:spLocks noGrp="1"/>
           </p:cNvSpPr>
@@ -179,7 +179,7 @@
       </p:sp>
       <p:sp>
         <p:nvSpPr>
-          <p:cNvPr id="679220945" name="日期占位符 2"/>
+          <p:cNvPr id="1840394226" name="日期占位符 2"/>
           <p:cNvSpPr>
             <a:spLocks noGrp="1"/>
           </p:cNvSpPr>
@@ -217,7 +217,7 @@
       </p:sp>
       <p:sp>
         <p:nvSpPr>
-          <p:cNvPr id="1090702434" name="幻灯片图像占位符 3"/>
+          <p:cNvPr id="1428165553" name="幻灯片图像占位符 3"/>
           <p:cNvSpPr>
             <a:spLocks noChangeAspect="1" noGrp="1" noRot="1"/>
           </p:cNvSpPr>
@@ -253,7 +253,7 @@
       </p:sp>
       <p:sp>
         <p:nvSpPr>
-          <p:cNvPr id="510511253" name="备注占位符 4"/>
+          <p:cNvPr id="161259252" name="备注占位符 4"/>
           <p:cNvSpPr>
             <a:spLocks noGrp="1"/>
           </p:cNvSpPr>
@@ -327,7 +327,7 @@
       </p:sp>
       <p:sp>
         <p:nvSpPr>
-          <p:cNvPr id="412276030" name="页脚占位符 5"/>
+          <p:cNvPr id="2036834310" name="页脚占位符 5"/>
           <p:cNvSpPr>
             <a:spLocks noGrp="1"/>
           </p:cNvSpPr>
@@ -361,7 +361,7 @@
       </p:sp>
       <p:sp>
         <p:nvSpPr>
-          <p:cNvPr id="1734220826" name="灯片编号占位符 6"/>
+          <p:cNvPr id="864496734" name="灯片编号占位符 6"/>
           <p:cNvSpPr>
             <a:spLocks noGrp="1"/>
           </p:cNvSpPr>
@@ -514,7 +514,7 @@
       </p:grpSpPr>
       <p:sp>
         <p:nvSpPr>
-          <p:cNvPr id="428496679" name="幻灯片图像占位符 1"/>
+          <p:cNvPr id="1960290515" name="幻灯片图像占位符 1"/>
           <p:cNvSpPr>
             <a:spLocks noChangeAspect="1" noGrp="1" noRot="1"/>
           </p:cNvSpPr>
@@ -526,7 +526,7 @@
       </p:sp>
       <p:sp>
         <p:nvSpPr>
-          <p:cNvPr id="1891684073" name="备注占位符 2"/>
+          <p:cNvPr id="176988506" name="备注占位符 2"/>
           <p:cNvSpPr>
             <a:spLocks noGrp="1"/>
           </p:cNvSpPr>
@@ -548,7 +548,7 @@
       </p:sp>
       <p:sp>
         <p:nvSpPr>
-          <p:cNvPr id="1139023875" name="灯片编号占位符 3"/>
+          <p:cNvPr id="1600085203" name="灯片编号占位符 3"/>
           <p:cNvSpPr>
             <a:spLocks noGrp="1"/>
           </p:cNvSpPr>
@@ -632,7 +632,7 @@
       </p:grpSpPr>
       <p:sp>
         <p:nvSpPr>
-          <p:cNvPr id="1185063930" name="Slide Image Placeholder 1"/>
+          <p:cNvPr id="1685893166" name="Slide Image Placeholder 1"/>
           <p:cNvSpPr>
             <a:spLocks noChangeAspect="1" noGrp="1" noRot="1"/>
           </p:cNvSpPr>
@@ -644,7 +644,7 @@
       </p:sp>
       <p:sp>
         <p:nvSpPr>
-          <p:cNvPr id="964784" name="Notes Placeholder 2"/>
+          <p:cNvPr id="976270487" name="Notes Placeholder 2"/>
           <p:cNvSpPr>
             <a:spLocks noGrp="1"/>
           </p:cNvSpPr>
@@ -666,7 +666,7 @@
       </p:sp>
       <p:sp>
         <p:nvSpPr>
-          <p:cNvPr id="1895316167" name="Slide Number Placeholder 3"/>
+          <p:cNvPr id="1273336088" name="Slide Number Placeholder 3"/>
           <p:cNvSpPr>
             <a:spLocks noGrp="1"/>
           </p:cNvSpPr>
@@ -717,7 +717,7 @@
       </p:grpSpPr>
       <p:sp>
         <p:nvSpPr>
-          <p:cNvPr id="352205009" name="Slide Image Placeholder 1"/>
+          <p:cNvPr id="1235787462" name="Slide Image Placeholder 1"/>
           <p:cNvSpPr>
             <a:spLocks noChangeAspect="1" noGrp="1" noRot="1"/>
           </p:cNvSpPr>
@@ -729,7 +729,7 @@
       </p:sp>
       <p:sp>
         <p:nvSpPr>
-          <p:cNvPr id="2137799688" name="Notes Placeholder 2"/>
+          <p:cNvPr id="1939891653" name="Notes Placeholder 2"/>
           <p:cNvSpPr>
             <a:spLocks noGrp="1"/>
           </p:cNvSpPr>
@@ -751,7 +751,7 @@
       </p:sp>
       <p:sp>
         <p:nvSpPr>
-          <p:cNvPr id="884019163" name="Slide Number Placeholder 3"/>
+          <p:cNvPr id="1992773217" name="Slide Number Placeholder 3"/>
           <p:cNvSpPr>
             <a:spLocks noGrp="1"/>
           </p:cNvSpPr>
@@ -802,7 +802,7 @@
       </p:grpSpPr>
       <p:sp>
         <p:nvSpPr>
-          <p:cNvPr id="1943723193" name="幻灯片图像占位符 1"/>
+          <p:cNvPr id="1231153183" name="幻灯片图像占位符 1"/>
           <p:cNvSpPr>
             <a:spLocks noChangeAspect="1" noGrp="1" noRot="1"/>
           </p:cNvSpPr>
@@ -814,7 +814,7 @@
       </p:sp>
       <p:sp>
         <p:nvSpPr>
-          <p:cNvPr id="87781523" name="备注占位符 2"/>
+          <p:cNvPr id="106962063" name="备注占位符 2"/>
           <p:cNvSpPr>
             <a:spLocks noGrp="1"/>
           </p:cNvSpPr>
@@ -836,7 +836,7 @@
       </p:sp>
       <p:sp>
         <p:nvSpPr>
-          <p:cNvPr id="511190085" name="灯片编号占位符 3"/>
+          <p:cNvPr id="64574771" name="灯片编号占位符 3"/>
           <p:cNvSpPr>
             <a:spLocks noGrp="1"/>
           </p:cNvSpPr>
@@ -920,7 +920,7 @@
       </p:grpSpPr>
       <p:sp>
         <p:nvSpPr>
-          <p:cNvPr id="1397611166" name="Slide Image Placeholder 1"/>
+          <p:cNvPr id="51619315" name="Slide Image Placeholder 1"/>
           <p:cNvSpPr>
             <a:spLocks noChangeAspect="1" noGrp="1" noRot="1"/>
           </p:cNvSpPr>
@@ -932,7 +932,7 @@
       </p:sp>
       <p:sp>
         <p:nvSpPr>
-          <p:cNvPr id="1806881715" name="Notes Placeholder 2"/>
+          <p:cNvPr id="2122758907" name="Notes Placeholder 2"/>
           <p:cNvSpPr>
             <a:spLocks noGrp="1"/>
           </p:cNvSpPr>
@@ -954,7 +954,7 @@
       </p:sp>
       <p:sp>
         <p:nvSpPr>
-          <p:cNvPr id="42723243" name="Slide Number Placeholder 3"/>
+          <p:cNvPr id="1013398501" name="Slide Number Placeholder 3"/>
           <p:cNvSpPr>
             <a:spLocks noGrp="1"/>
           </p:cNvSpPr>
@@ -1005,7 +1005,7 @@
       </p:grpSpPr>
       <p:sp>
         <p:nvSpPr>
-          <p:cNvPr id="2" name="Slide Image Placeholder 1"/>
+          <p:cNvPr id="1382383172" name="Slide Image Placeholder 1"/>
           <p:cNvSpPr>
             <a:spLocks noChangeAspect="1" noGrp="1" noRot="1"/>
           </p:cNvSpPr>
@@ -1017,7 +1017,7 @@
       </p:sp>
       <p:sp>
         <p:nvSpPr>
-          <p:cNvPr id="3" name="Notes Placeholder 2"/>
+          <p:cNvPr id="500728775" name="Notes Placeholder 2"/>
           <p:cNvSpPr>
             <a:spLocks noGrp="1"/>
           </p:cNvSpPr>
@@ -1039,7 +1039,7 @@
       </p:sp>
       <p:sp>
         <p:nvSpPr>
-          <p:cNvPr id="4" name="Slide Number Placeholder 3"/>
+          <p:cNvPr id="1012384455" name="Slide Number Placeholder 3"/>
           <p:cNvSpPr>
             <a:spLocks noGrp="1"/>
           </p:cNvSpPr>
@@ -1090,7 +1090,7 @@
       </p:grpSpPr>
       <p:sp>
         <p:nvSpPr>
-          <p:cNvPr id="2" name="Slide Image Placeholder 1"/>
+          <p:cNvPr id="773721650" name="Slide Image Placeholder 1"/>
           <p:cNvSpPr>
             <a:spLocks noChangeAspect="1" noGrp="1" noRot="1"/>
           </p:cNvSpPr>
@@ -1102,7 +1102,7 @@
       </p:sp>
       <p:sp>
         <p:nvSpPr>
-          <p:cNvPr id="3" name="Notes Placeholder 2"/>
+          <p:cNvPr id="1256934677" name="Notes Placeholder 2"/>
           <p:cNvSpPr>
             <a:spLocks noGrp="1"/>
           </p:cNvSpPr>
@@ -1124,7 +1124,7 @@
       </p:sp>
       <p:sp>
         <p:nvSpPr>
-          <p:cNvPr id="4" name="Slide Number Placeholder 3"/>
+          <p:cNvPr id="146787640" name="Slide Number Placeholder 3"/>
           <p:cNvSpPr>
             <a:spLocks noGrp="1"/>
           </p:cNvSpPr>
@@ -1175,7 +1175,7 @@
       </p:grpSpPr>
       <p:sp>
         <p:nvSpPr>
-          <p:cNvPr id="2" name="Slide Image Placeholder 1"/>
+          <p:cNvPr id="1662888446" name="Slide Image Placeholder 1"/>
           <p:cNvSpPr>
             <a:spLocks noChangeAspect="1" noGrp="1" noRot="1"/>
           </p:cNvSpPr>
@@ -1187,7 +1187,7 @@
       </p:sp>
       <p:sp>
         <p:nvSpPr>
-          <p:cNvPr id="3" name="Notes Placeholder 2"/>
+          <p:cNvPr id="178727150" name="Notes Placeholder 2"/>
           <p:cNvSpPr>
             <a:spLocks noGrp="1"/>
           </p:cNvSpPr>
@@ -1209,7 +1209,7 @@
       </p:sp>
       <p:sp>
         <p:nvSpPr>
-          <p:cNvPr id="4" name="Slide Number Placeholder 3"/>
+          <p:cNvPr id="1680221340" name="Slide Number Placeholder 3"/>
           <p:cNvSpPr>
             <a:spLocks noGrp="1"/>
           </p:cNvSpPr>
@@ -1260,7 +1260,7 @@
       </p:grpSpPr>
       <p:sp>
         <p:nvSpPr>
-          <p:cNvPr id="2" name="Slide Image Placeholder 1"/>
+          <p:cNvPr id="656410450" name="Slide Image Placeholder 1"/>
           <p:cNvSpPr>
             <a:spLocks noChangeAspect="1" noGrp="1" noRot="1"/>
           </p:cNvSpPr>
@@ -1272,7 +1272,7 @@
       </p:sp>
       <p:sp>
         <p:nvSpPr>
-          <p:cNvPr id="3" name="Notes Placeholder 2"/>
+          <p:cNvPr id="1220969984" name="Notes Placeholder 2"/>
           <p:cNvSpPr>
             <a:spLocks noGrp="1"/>
           </p:cNvSpPr>
@@ -1294,7 +1294,7 @@
       </p:sp>
       <p:sp>
         <p:nvSpPr>
-          <p:cNvPr id="4" name="Slide Number Placeholder 3"/>
+          <p:cNvPr id="242793339" name="Slide Number Placeholder 3"/>
           <p:cNvSpPr>
             <a:spLocks noGrp="1"/>
           </p:cNvSpPr>
@@ -1345,7 +1345,7 @@
       </p:grpSpPr>
       <p:sp>
         <p:nvSpPr>
-          <p:cNvPr id="1466833479" name="Slide Image Placeholder 1"/>
+          <p:cNvPr id="816434834" name="Slide Image Placeholder 1"/>
           <p:cNvSpPr>
             <a:spLocks noChangeAspect="1" noGrp="1" noRot="1"/>
           </p:cNvSpPr>
@@ -1357,7 +1357,7 @@
       </p:sp>
       <p:sp>
         <p:nvSpPr>
-          <p:cNvPr id="402474184" name="Notes Placeholder 2"/>
+          <p:cNvPr id="1715223982" name="Notes Placeholder 2"/>
           <p:cNvSpPr>
             <a:spLocks noGrp="1"/>
           </p:cNvSpPr>
@@ -1379,7 +1379,7 @@
       </p:sp>
       <p:sp>
         <p:nvSpPr>
-          <p:cNvPr id="2014231298" name="Slide Number Placeholder 3"/>
+          <p:cNvPr id="1590849598" name="Slide Number Placeholder 3"/>
           <p:cNvSpPr>
             <a:spLocks noGrp="1"/>
           </p:cNvSpPr>
@@ -1430,7 +1430,7 @@
       </p:grpSpPr>
       <p:sp>
         <p:nvSpPr>
-          <p:cNvPr id="1670094831" name="Slide Image Placeholder 1"/>
+          <p:cNvPr id="1148214493" name="Slide Image Placeholder 1"/>
           <p:cNvSpPr>
             <a:spLocks noChangeAspect="1" noGrp="1" noRot="1"/>
           </p:cNvSpPr>
@@ -1442,7 +1442,7 @@
       </p:sp>
       <p:sp>
         <p:nvSpPr>
-          <p:cNvPr id="1974290508" name="Notes Placeholder 2"/>
+          <p:cNvPr id="1035632715" name="Notes Placeholder 2"/>
           <p:cNvSpPr>
             <a:spLocks noGrp="1"/>
           </p:cNvSpPr>
@@ -1464,7 +1464,7 @@
       </p:sp>
       <p:sp>
         <p:nvSpPr>
-          <p:cNvPr id="810959252" name="Slide Number Placeholder 3"/>
+          <p:cNvPr id="898246778" name="Slide Number Placeholder 3"/>
           <p:cNvSpPr>
             <a:spLocks noGrp="1"/>
           </p:cNvSpPr>
@@ -1515,7 +1515,7 @@
       </p:grpSpPr>
       <p:sp>
         <p:nvSpPr>
-          <p:cNvPr id="1786310426" name="Slide Image Placeholder 1"/>
+          <p:cNvPr id="2055802844" name="Slide Image Placeholder 1"/>
           <p:cNvSpPr>
             <a:spLocks noChangeAspect="1" noGrp="1" noRot="1"/>
           </p:cNvSpPr>
@@ -1527,7 +1527,7 @@
       </p:sp>
       <p:sp>
         <p:nvSpPr>
-          <p:cNvPr id="424675219" name="Notes Placeholder 2"/>
+          <p:cNvPr id="41339410" name="Notes Placeholder 2"/>
           <p:cNvSpPr>
             <a:spLocks noGrp="1"/>
           </p:cNvSpPr>
@@ -1549,7 +1549,7 @@
       </p:sp>
       <p:sp>
         <p:nvSpPr>
-          <p:cNvPr id="513684535" name="Slide Number Placeholder 3"/>
+          <p:cNvPr id="322251372" name="Slide Number Placeholder 3"/>
           <p:cNvSpPr>
             <a:spLocks noGrp="1"/>
           </p:cNvSpPr>
@@ -1600,7 +1600,7 @@
       </p:grpSpPr>
       <p:sp>
         <p:nvSpPr>
-          <p:cNvPr id="1839198071" name="矩形 1"/>
+          <p:cNvPr id="1283195630" name="矩形 1"/>
           <p:cNvSpPr/>
           <p:nvPr userDrawn="1"/>
         </p:nvSpPr>
@@ -1670,7 +1670,7 @@
       </p:grpSpPr>
       <p:pic>
         <p:nvPicPr>
-          <p:cNvPr id="1785437485" name="图片 6"/>
+          <p:cNvPr id="1668903441" name="图片 6"/>
           <p:cNvPicPr>
             <a:picLocks noChangeAspect="1"/>
           </p:cNvPicPr>
@@ -1692,7 +1692,7 @@
       </p:pic>
       <p:sp>
         <p:nvSpPr>
-          <p:cNvPr id="1326340518" name="矩形 7"/>
+          <p:cNvPr id="1082554345" name="矩形 7"/>
           <p:cNvSpPr/>
           <p:nvPr userDrawn="1"/>
         </p:nvSpPr>
@@ -2086,7 +2086,7 @@
       </p:grpSpPr>
       <p:sp>
         <p:nvSpPr>
-          <p:cNvPr id="658542619" name="椭圆 8"/>
+          <p:cNvPr id="1616320669" name="椭圆 8"/>
           <p:cNvSpPr/>
           <p:nvPr/>
         </p:nvSpPr>
@@ -2160,7 +2160,7 @@
       </p:sp>
       <p:sp>
         <p:nvSpPr>
-          <p:cNvPr id="49539272" name="矩形 18"/>
+          <p:cNvPr id="1674151337" name="矩形 18"/>
           <p:cNvSpPr/>
           <p:nvPr/>
         </p:nvSpPr>
@@ -2211,7 +2211,7 @@
       </p:sp>
       <p:sp>
         <p:nvSpPr>
-          <p:cNvPr id="1464258962" name="矩形 25"/>
+          <p:cNvPr id="2020214165" name="矩形 25"/>
           <p:cNvSpPr/>
           <p:nvPr/>
         </p:nvSpPr>
@@ -2318,7 +2318,7 @@
       </p:sp>
       <p:sp>
         <p:nvSpPr>
-          <p:cNvPr id="949405414" name="椭圆 4"/>
+          <p:cNvPr id="1957922998" name="椭圆 4"/>
           <p:cNvSpPr/>
           <p:nvPr/>
         </p:nvSpPr>
@@ -2414,7 +2414,7 @@
       </p:sp>
       <p:pic>
         <p:nvPicPr>
-          <p:cNvPr id="1805679503" name="图片 6"/>
+          <p:cNvPr id="682312832" name="图片 6"/>
           <p:cNvPicPr>
             <a:picLocks noChangeAspect="1"/>
           </p:cNvPicPr>
@@ -2470,7 +2470,7 @@
       </p:grpSpPr>
       <p:pic>
         <p:nvPicPr>
-          <p:cNvPr id="1862524904" name=""/>
+          <p:cNvPr id="1384363310" name=""/>
           <p:cNvPicPr>
             <a:picLocks noChangeAspect="1"/>
           </p:cNvPicPr>
@@ -2492,7 +2492,7 @@
       </p:pic>
       <p:pic>
         <p:nvPicPr>
-          <p:cNvPr id="821949059" name=""/>
+          <p:cNvPr id="603227756" name=""/>
           <p:cNvPicPr>
             <a:picLocks noChangeAspect="1"/>
           </p:cNvPicPr>
@@ -2514,7 +2514,7 @@
       </p:pic>
       <p:pic>
         <p:nvPicPr>
-          <p:cNvPr id="701011817" name=""/>
+          <p:cNvPr id="1040570642" name=""/>
           <p:cNvPicPr>
             <a:picLocks noChangeAspect="1"/>
           </p:cNvPicPr>
@@ -2569,7 +2569,7 @@
       </p:grpSpPr>
       <p:sp>
         <p:nvSpPr>
-          <p:cNvPr id="1336125415" name="矩形 2"/>
+          <p:cNvPr id="224389502" name="矩形 2"/>
           <p:cNvSpPr/>
           <p:nvPr/>
         </p:nvSpPr>
@@ -2710,13 +2710,13 @@
       </p:sp>
       <p:sp>
         <p:nvSpPr>
-          <p:cNvPr id="850546659" name=""/>
+          <p:cNvPr id="1694588202" name=""/>
           <p:cNvSpPr txBox="1"/>
           <p:nvPr/>
         </p:nvSpPr>
         <p:spPr bwMode="auto">
           <a:xfrm rot="0" flipH="0" flipV="0">
-            <a:off x="301666" y="1340555"/>
+            <a:off x="301665" y="1340555"/>
             <a:ext cx="10911639" cy="441923"/>
           </a:xfrm>
           <a:prstGeom prst="rect">
@@ -2746,7 +2746,7 @@
       </p:sp>
       <p:sp>
         <p:nvSpPr>
-          <p:cNvPr id="461850558" name=""/>
+          <p:cNvPr id="1256808904" name=""/>
           <p:cNvSpPr txBox="1"/>
           <p:nvPr/>
         </p:nvSpPr>
@@ -3110,14 +3110,14 @@
       </p:sp>
       <p:sp>
         <p:nvSpPr>
-          <p:cNvPr id="1184965816" name=""/>
+          <p:cNvPr id="113193550" name=""/>
           <p:cNvSpPr txBox="1"/>
           <p:nvPr/>
         </p:nvSpPr>
         <p:spPr bwMode="auto">
           <a:xfrm rot="0" flipH="0" flipV="0">
-            <a:off x="193660" y="3633611"/>
-            <a:ext cx="11306541" cy="808010"/>
+            <a:off x="193659" y="3633610"/>
+            <a:ext cx="11352980" cy="1152829"/>
           </a:xfrm>
           <a:prstGeom prst="rect">
             <a:avLst/>
@@ -3272,6 +3272,17 @@
               <a:t>的高阶偏导数</a:t>
             </a:r>
             <a:r>
+              <a:rPr lang="en-US" sz="2200" b="0" i="0" u="none" strike="noStrike" cap="none" spc="0">
+                <a:solidFill>
+                  <a:schemeClr val="tx1"/>
+                </a:solidFill>
+                <a:latin typeface="等线"/>
+                <a:ea typeface="Arial"/>
+                <a:cs typeface="Arial"/>
+              </a:rPr>
+              <a:t>,据此修正误差的分辨和计算方法</a:t>
+            </a:r>
+            <a:r>
               <a:rPr lang="en-US" sz="2200"/>
               <a:t>.这也是我下一步的研究内容.</a:t>
             </a:r>
@@ -3314,7 +3325,7 @@
       </p:grpSpPr>
       <p:sp>
         <p:nvSpPr>
-          <p:cNvPr id="1946220001" name="椭圆 8"/>
+          <p:cNvPr id="101325394" name="椭圆 8"/>
           <p:cNvSpPr/>
           <p:nvPr/>
         </p:nvSpPr>
@@ -3388,7 +3399,7 @@
       </p:sp>
       <p:sp>
         <p:nvSpPr>
-          <p:cNvPr id="15275784" name="矩形 18"/>
+          <p:cNvPr id="1013915189" name="矩形 18"/>
           <p:cNvSpPr/>
           <p:nvPr/>
         </p:nvSpPr>
@@ -3439,7 +3450,7 @@
       </p:sp>
       <p:sp>
         <p:nvSpPr>
-          <p:cNvPr id="1570577311" name="椭圆 4"/>
+          <p:cNvPr id="137791567" name="椭圆 4"/>
           <p:cNvSpPr/>
           <p:nvPr/>
         </p:nvSpPr>
@@ -3535,7 +3546,7 @@
       </p:sp>
       <p:pic>
         <p:nvPicPr>
-          <p:cNvPr id="627746862" name="图片 6"/>
+          <p:cNvPr id="1966189671" name="图片 6"/>
           <p:cNvPicPr>
             <a:picLocks noChangeAspect="1"/>
           </p:cNvPicPr>
@@ -3591,7 +3602,7 @@
       </p:grpSpPr>
       <p:sp>
         <p:nvSpPr>
-          <p:cNvPr id="797899161" name="矩形 17"/>
+          <p:cNvPr id="2035065274" name="矩形 17"/>
           <p:cNvSpPr/>
           <p:nvPr/>
         </p:nvSpPr>
@@ -3640,7 +3651,7 @@
       </p:sp>
       <p:sp>
         <p:nvSpPr>
-          <p:cNvPr id="1084239542" name="矩形 22"/>
+          <p:cNvPr id="878830428" name="矩形 22"/>
           <p:cNvSpPr/>
           <p:nvPr/>
         </p:nvSpPr>
@@ -3716,16 +3727,16 @@
       </p:sp>
       <p:grpSp>
         <p:nvGrpSpPr>
-          <p:cNvPr id="1251808591" name="组合 2"/>
+          <p:cNvPr id="934720197" name="组合 2"/>
           <p:cNvGrpSpPr/>
           <p:nvPr/>
         </p:nvGrpSpPr>
         <p:grpSpPr bwMode="auto">
           <a:xfrm>
             <a:off x="488304" y="1569097"/>
-            <a:ext cx="3455807" cy="3408167"/>
+            <a:ext cx="3455807" cy="3408166"/>
             <a:chOff x="-9049" y="2167638"/>
-            <a:chExt cx="3455807" cy="3408167"/>
+            <a:chExt cx="3455807" cy="3408166"/>
           </a:xfrm>
           <a:solidFill>
             <a:schemeClr val="bg1"/>
@@ -4871,7 +4882,7 @@
       </p:grpSp>
       <p:sp>
         <p:nvSpPr>
-          <p:cNvPr id="788974935" name="Oval 4"/>
+          <p:cNvPr id="916456490" name="Oval 4"/>
           <p:cNvSpPr/>
           <p:nvPr/>
         </p:nvSpPr>
@@ -4961,7 +4972,7 @@
       </p:sp>
       <p:sp>
         <p:nvSpPr>
-          <p:cNvPr id="424009493" name="Oval 4"/>
+          <p:cNvPr id="1846030877" name="Oval 4"/>
           <p:cNvSpPr/>
           <p:nvPr/>
         </p:nvSpPr>
@@ -5051,7 +5062,7 @@
       </p:sp>
       <p:sp>
         <p:nvSpPr>
-          <p:cNvPr id="520697814" name="Oval 4"/>
+          <p:cNvPr id="1662773072" name="Oval 4"/>
           <p:cNvSpPr/>
           <p:nvPr/>
         </p:nvSpPr>
@@ -5141,7 +5152,7 @@
       </p:sp>
       <p:sp>
         <p:nvSpPr>
-          <p:cNvPr id="1404146392" name="Text Box 17"/>
+          <p:cNvPr id="1360172234" name="Text Box 17"/>
           <p:cNvSpPr txBox="1">
             <a:spLocks noChangeArrowheads="1"/>
           </p:cNvSpPr>
@@ -5305,7 +5316,7 @@
       </p:sp>
       <p:sp>
         <p:nvSpPr>
-          <p:cNvPr id="1368056794" name="Text Box 17"/>
+          <p:cNvPr id="1345843984" name="Text Box 17"/>
           <p:cNvSpPr txBox="1">
             <a:spLocks noChangeArrowheads="1"/>
           </p:cNvSpPr>
@@ -5472,7 +5483,7 @@
       </p:sp>
       <p:sp>
         <p:nvSpPr>
-          <p:cNvPr id="490302360" name="Text Box 17"/>
+          <p:cNvPr id="337735217" name="Text Box 17"/>
           <p:cNvSpPr txBox="1">
             <a:spLocks noChangeArrowheads="1"/>
           </p:cNvSpPr>
@@ -5682,7 +5693,7 @@
       </p:grpSpPr>
       <p:sp>
         <p:nvSpPr>
-          <p:cNvPr id="669764046" name="矩形 29"/>
+          <p:cNvPr id="367814260" name="矩形 29"/>
           <p:cNvSpPr/>
           <p:nvPr/>
         </p:nvSpPr>
@@ -5823,13 +5834,13 @@
       </p:sp>
       <p:sp>
         <p:nvSpPr>
-          <p:cNvPr id="1457542788" name=""/>
+          <p:cNvPr id="1433045728" name=""/>
           <p:cNvSpPr txBox="1"/>
           <p:nvPr/>
         </p:nvSpPr>
         <p:spPr bwMode="auto">
           <a:xfrm rot="0" flipH="0" flipV="0">
-            <a:off x="486681" y="1264227"/>
+            <a:off x="486680" y="1264227"/>
             <a:ext cx="11554445" cy="4754600"/>
           </a:xfrm>
           <a:prstGeom prst="rect">
@@ -5993,7 +6004,7 @@
       </p:grpSpPr>
       <p:sp>
         <p:nvSpPr>
-          <p:cNvPr id="1138531146" name="矩形 34"/>
+          <p:cNvPr id="1600842340" name="矩形 34"/>
           <p:cNvSpPr/>
           <p:nvPr/>
         </p:nvSpPr>
@@ -6134,7 +6145,7 @@
       </p:sp>
       <p:sp>
         <p:nvSpPr>
-          <p:cNvPr id="1876968264" name=""/>
+          <p:cNvPr id="649029115" name=""/>
           <p:cNvSpPr txBox="1"/>
           <p:nvPr/>
         </p:nvSpPr>
@@ -6308,7 +6319,7 @@
       </p:sp>
       <p:pic>
         <p:nvPicPr>
-          <p:cNvPr id="88825728" name=""/>
+          <p:cNvPr id="1369654072" name=""/>
           <p:cNvPicPr>
             <a:picLocks noChangeAspect="1"/>
           </p:cNvPicPr>
@@ -6363,7 +6374,7 @@
       </p:grpSpPr>
       <p:sp>
         <p:nvSpPr>
-          <p:cNvPr id="1755856580" name="矩形 66"/>
+          <p:cNvPr id="1855143831" name="矩形 66"/>
           <p:cNvSpPr/>
           <p:nvPr/>
         </p:nvSpPr>
@@ -6504,14 +6515,14 @@
       </p:sp>
       <p:sp>
         <p:nvSpPr>
-          <p:cNvPr id="1295719341" name=""/>
+          <p:cNvPr id="1180331024" name=""/>
           <p:cNvSpPr txBox="1"/>
           <p:nvPr/>
         </p:nvSpPr>
         <p:spPr bwMode="auto">
           <a:xfrm rot="0" flipH="0" flipV="0">
-            <a:off x="503999" y="1246908"/>
-            <a:ext cx="11816487" cy="1303659"/>
+            <a:off x="503998" y="1246907"/>
+            <a:ext cx="11829806" cy="1608459"/>
           </a:xfrm>
           <a:prstGeom prst="rect">
             <a:avLst/>
@@ -6543,12 +6554,16 @@
               <a:defRPr/>
             </a:pPr>
             <a:r>
-              <a:rPr lang="en-US" sz="2000"/>
-              <a:t>现在主要工作是，对于一个不可求出显式积分表达式的系统，尝试其他方法找到多个参数对其的影响的解析式.</a:t>
+              <a:rPr lang="en-US" sz="2000" b="1"/>
+              <a:t>现在主要工作是，对于一个不可求出显式积分表达式的系统，尝试其他方法找到多个参数对其的影响的解析式</a:t>
             </a:r>
             <a:r>
               <a:rPr lang="en-US" sz="2000"/>
-              <a:t>原来是从波函数角度研究编织保真度，非常复杂.因此我希望从流形上就能找到和保真度的关系</a:t>
+              <a:t>.</a:t>
+            </a:r>
+            <a:r>
+              <a:rPr lang="en-US" sz="2000"/>
+              <a:t>原来是从波函数角度研究编织保真度，非常复杂.因此我希望从哈密顿对应流形上就能找到和保真度的关系</a:t>
             </a:r>
             <a:endParaRPr/>
           </a:p>
@@ -6556,7 +6571,7 @@
       </p:sp>
       <p:pic>
         <p:nvPicPr>
-          <p:cNvPr id="1320841000" name=""/>
+          <p:cNvPr id="1602226593" name=""/>
           <p:cNvPicPr>
             <a:picLocks noChangeAspect="1"/>
           </p:cNvPicPr>
@@ -6569,7 +6584,7 @@
         <p:spPr bwMode="auto">
           <a:xfrm flipH="0" flipV="0">
             <a:off x="175180" y="3283933"/>
-            <a:ext cx="10755221" cy="3004657"/>
+            <a:ext cx="10755221" cy="3004656"/>
           </a:xfrm>
           <a:prstGeom prst="rect">
             <a:avLst/>
@@ -6578,7 +6593,7 @@
       </p:pic>
       <p:pic>
         <p:nvPicPr>
-          <p:cNvPr id="1252695782" name=""/>
+          <p:cNvPr id="627608372" name=""/>
           <p:cNvPicPr>
             <a:picLocks noChangeAspect="1"/>
           </p:cNvPicPr>
@@ -6633,7 +6648,7 @@
       </p:grpSpPr>
       <p:sp>
         <p:nvSpPr>
-          <p:cNvPr id="1599897377" name="矩形 2"/>
+          <p:cNvPr id="1083773271" name="矩形 2"/>
           <p:cNvSpPr/>
           <p:nvPr/>
         </p:nvSpPr>
@@ -6774,7 +6789,7 @@
       </p:sp>
       <p:sp>
         <p:nvSpPr>
-          <p:cNvPr id="412053458" name=""/>
+          <p:cNvPr id="1751497459" name=""/>
           <p:cNvSpPr txBox="1"/>
           <p:nvPr/>
         </p:nvSpPr>
@@ -6802,7 +6817,7 @@
       </p:sp>
       <p:pic>
         <p:nvPicPr>
-          <p:cNvPr id="1601060656" name=""/>
+          <p:cNvPr id="731851827" name=""/>
           <p:cNvPicPr>
             <a:picLocks noChangeAspect="1"/>
           </p:cNvPicPr>
@@ -6857,7 +6872,7 @@
       </p:grpSpPr>
       <p:pic>
         <p:nvPicPr>
-          <p:cNvPr id="1134524637" name=""/>
+          <p:cNvPr id="994058176" name=""/>
           <p:cNvPicPr>
             <a:picLocks noChangeAspect="1"/>
           </p:cNvPicPr>
@@ -6879,14 +6894,14 @@
       </p:pic>
       <p:sp>
         <p:nvSpPr>
-          <p:cNvPr id="1483989650" name=""/>
+          <p:cNvPr id="1835083111" name=""/>
           <p:cNvSpPr txBox="1"/>
           <p:nvPr/>
         </p:nvSpPr>
         <p:spPr bwMode="auto">
           <a:xfrm rot="0" flipH="0" flipV="0">
-            <a:off x="336944" y="440971"/>
-            <a:ext cx="11284588" cy="792047"/>
+            <a:off x="336943" y="440970"/>
+            <a:ext cx="11290347" cy="792047"/>
           </a:xfrm>
           <a:prstGeom prst="rect">
             <a:avLst/>
@@ -6925,7 +6940,7 @@
             </a:pPr>
             <a:r>
               <a:rPr lang="en-US" sz="2200"/>
-              <a:t>如果演化结果和理想一直，那么一定保真度为1. 反之，研究这个误差是怎么的演化关系</a:t>
+              <a:t>如果演化结果和理想一致，那么一定保真度为1. 反之，研究这个误差是怎么的演化关系</a:t>
             </a:r>
             <a:endParaRPr/>
           </a:p>
@@ -6966,7 +6981,7 @@
       </p:grpSpPr>
       <p:pic>
         <p:nvPicPr>
-          <p:cNvPr id="51331922" name=""/>
+          <p:cNvPr id="1393115778" name=""/>
           <p:cNvPicPr>
             <a:picLocks noChangeAspect="1"/>
           </p:cNvPicPr>
@@ -6979,7 +6994,7 @@
         <p:spPr bwMode="auto">
           <a:xfrm flipH="0" flipV="0">
             <a:off x="795555" y="450354"/>
-            <a:ext cx="10388734" cy="6254715"/>
+            <a:ext cx="10388733" cy="6254715"/>
           </a:xfrm>
           <a:prstGeom prst="rect">
             <a:avLst/>
@@ -7021,7 +7036,7 @@
       </p:grpSpPr>
       <p:pic>
         <p:nvPicPr>
-          <p:cNvPr id="1768351494" name=""/>
+          <p:cNvPr id="1832073915" name=""/>
           <p:cNvPicPr>
             <a:picLocks noChangeAspect="1"/>
           </p:cNvPicPr>
